--- a/docs/AAFA-website-overview.pptx
+++ b/docs/AAFA-website-overview.pptx
@@ -3817,7 +3817,7 @@
                 </a:solidFill>
                 <a:latin typeface="Trebuchet MS"/>
               </a:rPr>
-              <a:t>MONEY</a:t>
+              <a:t>MONEY — ACTUAL FIGURES FROM THE BILL</a:t>
             </a:r>
           </a:p>
         </p:txBody>
@@ -3909,8 +3909,8 @@
         </p:nvSpPr>
         <p:spPr>
           <a:xfrm>
-            <a:off x="777240" y="1965960"/>
-            <a:ext cx="10607040" cy="4114800"/>
+            <a:off x="777240" y="1719072"/>
+            <a:ext cx="7863840" cy="411480"/>
           </a:xfrm>
           <a:prstGeom prst="rect">
             <a:avLst/>
@@ -3923,187 +3923,703 @@
           </a:bodyPr>
           <a:lstStyle/>
           <a:p>
-            <a:pPr algn="l">
-              <a:spcAft>
-                <a:spcPts val="1400"/>
-              </a:spcAft>
-            </a:pPr>
-            <a:r>
-              <a:rPr sz="1600" b="1" i="0">
-                <a:solidFill>
-                  <a:srgbClr val="DA7B37"/>
-                </a:solidFill>
-                <a:latin typeface="Trebuchet MS"/>
-              </a:rPr>
-              <a:t>▪  </a:t>
-            </a:r>
-            <a:r>
-              <a:rPr sz="1600" b="1" i="0">
+            <a:pPr algn="l"/>
+            <a:r>
+              <a:rPr sz="1500" b="0" i="0">
+                <a:solidFill>
+                  <a:srgbClr val="1D2A21"/>
+                </a:solidFill>
+                <a:latin typeface="Trebuchet MS"/>
+              </a:rPr>
+              <a:t>Route 53 hosted zone</a:t>
+            </a:r>
+          </a:p>
+        </p:txBody>
+      </p:sp>
+      <p:sp>
+        <p:nvSpPr>
+          <p:cNvPr id="7" name="TextBox 6"/>
+          <p:cNvSpPr txBox="1"/>
+          <p:nvPr/>
+        </p:nvSpPr>
+        <p:spPr>
+          <a:xfrm>
+            <a:off x="777240" y="1956815"/>
+            <a:ext cx="7863840" cy="320040"/>
+          </a:xfrm>
+          <a:prstGeom prst="rect">
+            <a:avLst/>
+          </a:prstGeom>
+          <a:noFill/>
+        </p:spPr>
+        <p:txBody>
+          <a:bodyPr wrap="square">
+            <a:spAutoFit/>
+          </a:bodyPr>
+          <a:lstStyle/>
+          <a:p>
+            <a:pPr algn="l"/>
+            <a:r>
+              <a:rPr sz="1100" b="0" i="0">
+                <a:solidFill>
+                  <a:srgbClr val="556666"/>
+                </a:solidFill>
+                <a:latin typeface="Trebuchet MS"/>
+              </a:rPr>
+              <a:t>The fixed charge for holding the domain’s address records. The only charge that is not pennies.</a:t>
+            </a:r>
+          </a:p>
+        </p:txBody>
+      </p:sp>
+      <p:sp>
+        <p:nvSpPr>
+          <p:cNvPr id="8" name="TextBox 7"/>
+          <p:cNvSpPr txBox="1"/>
+          <p:nvPr/>
+        </p:nvSpPr>
+        <p:spPr>
+          <a:xfrm>
+            <a:off x="8778240" y="1719072"/>
+            <a:ext cx="2606040" cy="411480"/>
+          </a:xfrm>
+          <a:prstGeom prst="rect">
+            <a:avLst/>
+          </a:prstGeom>
+          <a:noFill/>
+        </p:spPr>
+        <p:txBody>
+          <a:bodyPr wrap="square">
+            <a:spAutoFit/>
+          </a:bodyPr>
+          <a:lstStyle/>
+          <a:p>
+            <a:pPr algn="r"/>
+            <a:r>
+              <a:rPr sz="1500" b="0" i="0">
+                <a:solidFill>
+                  <a:srgbClr val="1D2A21"/>
+                </a:solidFill>
+                <a:latin typeface="Trebuchet MS"/>
+              </a:rPr>
+              <a:t>$0.50 / month</a:t>
+            </a:r>
+          </a:p>
+        </p:txBody>
+      </p:sp>
+      <p:sp>
+        <p:nvSpPr>
+          <p:cNvPr id="9" name="TextBox 8"/>
+          <p:cNvSpPr txBox="1"/>
+          <p:nvPr/>
+        </p:nvSpPr>
+        <p:spPr>
+          <a:xfrm>
+            <a:off x="777240" y="2322576"/>
+            <a:ext cx="7863840" cy="411480"/>
+          </a:xfrm>
+          <a:prstGeom prst="rect">
+            <a:avLst/>
+          </a:prstGeom>
+          <a:noFill/>
+        </p:spPr>
+        <p:txBody>
+          <a:bodyPr wrap="square">
+            <a:spAutoFit/>
+          </a:bodyPr>
+          <a:lstStyle/>
+          <a:p>
+            <a:pPr algn="l"/>
+            <a:r>
+              <a:rPr sz="1500" b="0" i="0">
+                <a:solidFill>
+                  <a:srgbClr val="1D2A21"/>
+                </a:solidFill>
+                <a:latin typeface="Trebuchet MS"/>
+              </a:rPr>
+              <a:t>DNS lookups — 2,205 of them so far</a:t>
+            </a:r>
+          </a:p>
+        </p:txBody>
+      </p:sp>
+      <p:sp>
+        <p:nvSpPr>
+          <p:cNvPr id="10" name="TextBox 9"/>
+          <p:cNvSpPr txBox="1"/>
+          <p:nvPr/>
+        </p:nvSpPr>
+        <p:spPr>
+          <a:xfrm>
+            <a:off x="8778240" y="2322576"/>
+            <a:ext cx="2606040" cy="411480"/>
+          </a:xfrm>
+          <a:prstGeom prst="rect">
+            <a:avLst/>
+          </a:prstGeom>
+          <a:noFill/>
+        </p:spPr>
+        <p:txBody>
+          <a:bodyPr wrap="square">
+            <a:spAutoFit/>
+          </a:bodyPr>
+          <a:lstStyle/>
+          <a:p>
+            <a:pPr algn="r"/>
+            <a:r>
+              <a:rPr sz="1500" b="0" i="0">
+                <a:solidFill>
+                  <a:srgbClr val="1D2A21"/>
+                </a:solidFill>
+                <a:latin typeface="Trebuchet MS"/>
+              </a:rPr>
+              <a:t>$0.0009</a:t>
+            </a:r>
+          </a:p>
+        </p:txBody>
+      </p:sp>
+      <p:sp>
+        <p:nvSpPr>
+          <p:cNvPr id="11" name="TextBox 10"/>
+          <p:cNvSpPr txBox="1"/>
+          <p:nvPr/>
+        </p:nvSpPr>
+        <p:spPr>
+          <a:xfrm>
+            <a:off x="777240" y="2724912"/>
+            <a:ext cx="7863840" cy="411480"/>
+          </a:xfrm>
+          <a:prstGeom prst="rect">
+            <a:avLst/>
+          </a:prstGeom>
+          <a:noFill/>
+        </p:spPr>
+        <p:txBody>
+          <a:bodyPr wrap="square">
+            <a:spAutoFit/>
+          </a:bodyPr>
+          <a:lstStyle/>
+          <a:p>
+            <a:pPr algn="l"/>
+            <a:r>
+              <a:rPr sz="1500" b="0" i="0">
+                <a:solidFill>
+                  <a:srgbClr val="1D2A21"/>
+                </a:solidFill>
+                <a:latin typeface="Trebuchet MS"/>
+              </a:rPr>
+              <a:t>Amplify, S3, Lambda, DynamoDB, Cognito, API Gateway</a:t>
+            </a:r>
+          </a:p>
+        </p:txBody>
+      </p:sp>
+      <p:sp>
+        <p:nvSpPr>
+          <p:cNvPr id="12" name="TextBox 11"/>
+          <p:cNvSpPr txBox="1"/>
+          <p:nvPr/>
+        </p:nvSpPr>
+        <p:spPr>
+          <a:xfrm>
+            <a:off x="777240" y="2962656"/>
+            <a:ext cx="7863840" cy="320040"/>
+          </a:xfrm>
+          <a:prstGeom prst="rect">
+            <a:avLst/>
+          </a:prstGeom>
+          <a:noFill/>
+        </p:spPr>
+        <p:txBody>
+          <a:bodyPr wrap="square">
+            <a:spAutoFit/>
+          </a:bodyPr>
+          <a:lstStyle/>
+          <a:p>
+            <a:pPr algn="l"/>
+            <a:r>
+              <a:rPr sz="1100" b="0" i="0">
+                <a:solidFill>
+                  <a:srgbClr val="556666"/>
+                </a:solidFill>
+                <a:latin typeface="Trebuchet MS"/>
+              </a:rPr>
+              <a:t>All six together, for the month to date.</a:t>
+            </a:r>
+          </a:p>
+        </p:txBody>
+      </p:sp>
+      <p:sp>
+        <p:nvSpPr>
+          <p:cNvPr id="13" name="TextBox 12"/>
+          <p:cNvSpPr txBox="1"/>
+          <p:nvPr/>
+        </p:nvSpPr>
+        <p:spPr>
+          <a:xfrm>
+            <a:off x="8778240" y="2724912"/>
+            <a:ext cx="2606040" cy="411480"/>
+          </a:xfrm>
+          <a:prstGeom prst="rect">
+            <a:avLst/>
+          </a:prstGeom>
+          <a:noFill/>
+        </p:spPr>
+        <p:txBody>
+          <a:bodyPr wrap="square">
+            <a:spAutoFit/>
+          </a:bodyPr>
+          <a:lstStyle/>
+          <a:p>
+            <a:pPr algn="r"/>
+            <a:r>
+              <a:rPr sz="1500" b="0" i="0">
+                <a:solidFill>
+                  <a:srgbClr val="1D2A21"/>
+                </a:solidFill>
+                <a:latin typeface="Trebuchet MS"/>
+              </a:rPr>
+              <a:t>$0.0004</a:t>
+            </a:r>
+          </a:p>
+        </p:txBody>
+      </p:sp>
+      <p:sp>
+        <p:nvSpPr>
+          <p:cNvPr id="14" name="Rectangle 13"/>
+          <p:cNvSpPr/>
+          <p:nvPr/>
+        </p:nvSpPr>
+        <p:spPr>
+          <a:xfrm>
+            <a:off x="777240" y="3328416"/>
+            <a:ext cx="10607040" cy="12700"/>
+          </a:xfrm>
+          <a:prstGeom prst="rect">
+            <a:avLst/>
+          </a:prstGeom>
+          <a:solidFill>
+            <a:srgbClr val="E2E0D8"/>
+          </a:solidFill>
+          <a:ln>
+            <a:noFill/>
+          </a:ln>
+          <a:effectLst/>
+        </p:spPr>
+        <p:style>
+          <a:lnRef idx="1">
+            <a:schemeClr val="accent1"/>
+          </a:lnRef>
+          <a:fillRef idx="3">
+            <a:schemeClr val="accent1"/>
+          </a:fillRef>
+          <a:effectRef idx="2">
+            <a:schemeClr val="accent1"/>
+          </a:effectRef>
+          <a:fontRef idx="minor">
+            <a:schemeClr val="lt1"/>
+          </a:fontRef>
+        </p:style>
+        <p:txBody>
+          <a:bodyPr rtlCol="0" anchor="ctr"/>
+          <a:lstStyle/>
+          <a:p>
+            <a:pPr algn="ctr"/>
+          </a:p>
+        </p:txBody>
+      </p:sp>
+      <p:sp>
+        <p:nvSpPr>
+          <p:cNvPr id="15" name="TextBox 14"/>
+          <p:cNvSpPr txBox="1"/>
+          <p:nvPr/>
+        </p:nvSpPr>
+        <p:spPr>
+          <a:xfrm>
+            <a:off x="777240" y="3474720"/>
+            <a:ext cx="7863840" cy="411480"/>
+          </a:xfrm>
+          <a:prstGeom prst="rect">
+            <a:avLst/>
+          </a:prstGeom>
+          <a:noFill/>
+        </p:spPr>
+        <p:txBody>
+          <a:bodyPr wrap="square">
+            <a:spAutoFit/>
+          </a:bodyPr>
+          <a:lstStyle/>
+          <a:p>
+            <a:pPr algn="l"/>
+            <a:r>
+              <a:rPr sz="1500" b="1" i="0">
                 <a:solidFill>
                   <a:srgbClr val="19462B"/>
                 </a:solidFill>
                 <a:latin typeface="Trebuchet MS"/>
               </a:rPr>
-              <a:t>Hosting, ledger and helpers.</a:t>
-            </a:r>
-            <a:r>
-              <a:rPr sz="1600" b="0" i="0">
+              <a:t>September so far — everything</a:t>
+            </a:r>
+          </a:p>
+        </p:txBody>
+      </p:sp>
+      <p:sp>
+        <p:nvSpPr>
+          <p:cNvPr id="16" name="TextBox 15"/>
+          <p:cNvSpPr txBox="1"/>
+          <p:nvPr/>
+        </p:nvSpPr>
+        <p:spPr>
+          <a:xfrm>
+            <a:off x="8778240" y="3474720"/>
+            <a:ext cx="2606040" cy="411480"/>
+          </a:xfrm>
+          <a:prstGeom prst="rect">
+            <a:avLst/>
+          </a:prstGeom>
+          <a:noFill/>
+        </p:spPr>
+        <p:txBody>
+          <a:bodyPr wrap="square">
+            <a:spAutoFit/>
+          </a:bodyPr>
+          <a:lstStyle/>
+          <a:p>
+            <a:pPr algn="r"/>
+            <a:r>
+              <a:rPr sz="1500" b="1" i="0">
+                <a:solidFill>
+                  <a:srgbClr val="265438"/>
+                </a:solidFill>
+                <a:latin typeface="Trebuchet MS"/>
+              </a:rPr>
+              <a:t>$0.50</a:t>
+            </a:r>
+          </a:p>
+        </p:txBody>
+      </p:sp>
+      <p:sp>
+        <p:nvSpPr>
+          <p:cNvPr id="17" name="TextBox 16"/>
+          <p:cNvSpPr txBox="1"/>
+          <p:nvPr/>
+        </p:nvSpPr>
+        <p:spPr>
+          <a:xfrm>
+            <a:off x="777240" y="3895344"/>
+            <a:ext cx="7863840" cy="411480"/>
+          </a:xfrm>
+          <a:prstGeom prst="rect">
+            <a:avLst/>
+          </a:prstGeom>
+          <a:noFill/>
+        </p:spPr>
+        <p:txBody>
+          <a:bodyPr wrap="square">
+            <a:spAutoFit/>
+          </a:bodyPr>
+          <a:lstStyle/>
+          <a:p>
+            <a:pPr algn="l"/>
+            <a:r>
+              <a:rPr sz="1500" b="0" i="0">
                 <a:solidFill>
                   <a:srgbClr val="1D2A21"/>
                 </a:solidFill>
                 <a:latin typeface="Trebuchet MS"/>
               </a:rPr>
-              <a:t>  Comfortably inside the free allowances Amazon gives an organisation our size.</a:t>
-            </a:r>
-          </a:p>
-          <a:p>
-            <a:pPr>
-              <a:spcAft>
-                <a:spcPts val="1400"/>
-              </a:spcAft>
-            </a:pPr>
-            <a:r>
-              <a:rPr sz="1600" b="1" i="0">
-                <a:solidFill>
-                  <a:srgbClr val="DA7B37"/>
-                </a:solidFill>
-                <a:latin typeface="Trebuchet MS"/>
-              </a:rPr>
-              <a:t>▪  </a:t>
-            </a:r>
-            <a:r>
-              <a:rPr sz="1600" b="1" i="0">
-                <a:solidFill>
-                  <a:srgbClr val="19462B"/>
-                </a:solidFill>
-                <a:latin typeface="Trebuchet MS"/>
-              </a:rPr>
-              <a:t>The bill so far.</a:t>
-            </a:r>
-            <a:r>
-              <a:rPr sz="1600" b="0" i="0">
+              <a:t>August</a:t>
+            </a:r>
+          </a:p>
+        </p:txBody>
+      </p:sp>
+      <p:sp>
+        <p:nvSpPr>
+          <p:cNvPr id="18" name="TextBox 17"/>
+          <p:cNvSpPr txBox="1"/>
+          <p:nvPr/>
+        </p:nvSpPr>
+        <p:spPr>
+          <a:xfrm>
+            <a:off x="777240" y="4133088"/>
+            <a:ext cx="7863840" cy="320040"/>
+          </a:xfrm>
+          <a:prstGeom prst="rect">
+            <a:avLst/>
+          </a:prstGeom>
+          <a:noFill/>
+        </p:spPr>
+        <p:txBody>
+          <a:bodyPr wrap="square">
+            <a:spAutoFit/>
+          </a:bodyPr>
+          <a:lstStyle/>
+          <a:p>
+            <a:pPr algn="l"/>
+            <a:r>
+              <a:rPr sz="1100" b="0" i="0">
+                <a:solidFill>
+                  <a:srgbClr val="556666"/>
+                </a:solidFill>
+                <a:latin typeface="Trebuchet MS"/>
+              </a:rPr>
+              <a:t>Nothing was running yet.</a:t>
+            </a:r>
+          </a:p>
+        </p:txBody>
+      </p:sp>
+      <p:sp>
+        <p:nvSpPr>
+          <p:cNvPr id="19" name="TextBox 18"/>
+          <p:cNvSpPr txBox="1"/>
+          <p:nvPr/>
+        </p:nvSpPr>
+        <p:spPr>
+          <a:xfrm>
+            <a:off x="8778240" y="3895344"/>
+            <a:ext cx="2606040" cy="411480"/>
+          </a:xfrm>
+          <a:prstGeom prst="rect">
+            <a:avLst/>
+          </a:prstGeom>
+          <a:noFill/>
+        </p:spPr>
+        <p:txBody>
+          <a:bodyPr wrap="square">
+            <a:spAutoFit/>
+          </a:bodyPr>
+          <a:lstStyle/>
+          <a:p>
+            <a:pPr algn="r"/>
+            <a:r>
+              <a:rPr sz="1500" b="0" i="0">
                 <a:solidFill>
                   <a:srgbClr val="1D2A21"/>
                 </a:solidFill>
                 <a:latin typeface="Trebuchet MS"/>
               </a:rPr>
-              <a:t>  Amazon’s cost reporting shows no service charges for August, or for September to date.</a:t>
-            </a:r>
-          </a:p>
-          <a:p>
-            <a:pPr>
-              <a:spcAft>
-                <a:spcPts val="1400"/>
-              </a:spcAft>
-            </a:pPr>
-            <a:r>
-              <a:rPr sz="1600" b="1" i="0">
-                <a:solidFill>
-                  <a:srgbClr val="DA7B37"/>
-                </a:solidFill>
-                <a:latin typeface="Trebuchet MS"/>
-              </a:rPr>
-              <a:t>▪  </a:t>
-            </a:r>
-            <a:r>
-              <a:rPr sz="1600" b="1" i="0">
-                <a:solidFill>
-                  <a:srgbClr val="19462B"/>
-                </a:solidFill>
-                <a:latin typeface="Trebuchet MS"/>
-              </a:rPr>
-              <a:t>The domain name.</a:t>
-            </a:r>
-            <a:r>
-              <a:rPr sz="1600" b="0" i="0">
+              <a:t>$0.00</a:t>
+            </a:r>
+          </a:p>
+        </p:txBody>
+      </p:sp>
+      <p:sp>
+        <p:nvSpPr>
+          <p:cNvPr id="20" name="TextBox 19"/>
+          <p:cNvSpPr txBox="1"/>
+          <p:nvPr/>
+        </p:nvSpPr>
+        <p:spPr>
+          <a:xfrm>
+            <a:off x="777240" y="4480560"/>
+            <a:ext cx="7863840" cy="411480"/>
+          </a:xfrm>
+          <a:prstGeom prst="rect">
+            <a:avLst/>
+          </a:prstGeom>
+          <a:noFill/>
+        </p:spPr>
+        <p:txBody>
+          <a:bodyPr wrap="square">
+            <a:spAutoFit/>
+          </a:bodyPr>
+          <a:lstStyle/>
+          <a:p>
+            <a:pPr algn="l"/>
+            <a:r>
+              <a:rPr sz="1500" b="0" i="0">
                 <a:solidFill>
                   <a:srgbClr val="1D2A21"/>
                 </a:solidFill>
                 <a:latin typeface="Trebuchet MS"/>
               </a:rPr>
-              <a:t>  austinareafirewise.org renews on 12 September 2027, set to renew automatically. An annual registration fee is the one certain cost.</a:t>
-            </a:r>
-          </a:p>
-          <a:p>
-            <a:pPr>
-              <a:spcAft>
-                <a:spcPts val="1400"/>
-              </a:spcAft>
-            </a:pPr>
-            <a:r>
-              <a:rPr sz="1600" b="1" i="0">
-                <a:solidFill>
-                  <a:srgbClr val="DA7B37"/>
-                </a:solidFill>
-                <a:latin typeface="Trebuchet MS"/>
-              </a:rPr>
-              <a:t>▪  </a:t>
-            </a:r>
-            <a:r>
-              <a:rPr sz="1600" b="1" i="0">
-                <a:solidFill>
-                  <a:srgbClr val="19462B"/>
-                </a:solidFill>
-                <a:latin typeface="Trebuchet MS"/>
-              </a:rPr>
-              <a:t>Email.</a:t>
-            </a:r>
-            <a:r>
-              <a:rPr sz="1600" b="0" i="0">
+              <a:t>austinareafirewise.org — registration and renewal</a:t>
+            </a:r>
+          </a:p>
+        </p:txBody>
+      </p:sp>
+      <p:sp>
+        <p:nvSpPr>
+          <p:cNvPr id="21" name="TextBox 20"/>
+          <p:cNvSpPr txBox="1"/>
+          <p:nvPr/>
+        </p:nvSpPr>
+        <p:spPr>
+          <a:xfrm>
+            <a:off x="777240" y="4718304"/>
+            <a:ext cx="7863840" cy="320040"/>
+          </a:xfrm>
+          <a:prstGeom prst="rect">
+            <a:avLst/>
+          </a:prstGeom>
+          <a:noFill/>
+        </p:spPr>
+        <p:txBody>
+          <a:bodyPr wrap="square">
+            <a:spAutoFit/>
+          </a:bodyPr>
+          <a:lstStyle/>
+          <a:p>
+            <a:pPr algn="l"/>
+            <a:r>
+              <a:rPr sz="1100" b="0" i="0">
+                <a:solidFill>
+                  <a:srgbClr val="556666"/>
+                </a:solidFill>
+                <a:latin typeface="Trebuchet MS"/>
+              </a:rPr>
+              <a:t>Amazon’s current .org price. Renews 12 September 2027, automatically. Not yet on the bill.</a:t>
+            </a:r>
+          </a:p>
+        </p:txBody>
+      </p:sp>
+      <p:sp>
+        <p:nvSpPr>
+          <p:cNvPr id="22" name="TextBox 21"/>
+          <p:cNvSpPr txBox="1"/>
+          <p:nvPr/>
+        </p:nvSpPr>
+        <p:spPr>
+          <a:xfrm>
+            <a:off x="8778240" y="4480560"/>
+            <a:ext cx="2606040" cy="411480"/>
+          </a:xfrm>
+          <a:prstGeom prst="rect">
+            <a:avLst/>
+          </a:prstGeom>
+          <a:noFill/>
+        </p:spPr>
+        <p:txBody>
+          <a:bodyPr wrap="square">
+            <a:spAutoFit/>
+          </a:bodyPr>
+          <a:lstStyle/>
+          <a:p>
+            <a:pPr algn="r"/>
+            <a:r>
+              <a:rPr sz="1500" b="0" i="0">
                 <a:solidFill>
                   <a:srgbClr val="1D2A21"/>
                 </a:solidFill>
                 <a:latin typeface="Trebuchet MS"/>
               </a:rPr>
-              <a:t>  Free at the volumes we send.</a:t>
-            </a:r>
-          </a:p>
-          <a:p>
-            <a:pPr>
-              <a:spcAft>
-                <a:spcPts val="1400"/>
-              </a:spcAft>
-            </a:pPr>
-            <a:r>
-              <a:rPr sz="1600" b="1" i="0">
-                <a:solidFill>
-                  <a:srgbClr val="DA7B37"/>
-                </a:solidFill>
-                <a:latin typeface="Trebuchet MS"/>
-              </a:rPr>
-              <a:t>▪  </a:t>
-            </a:r>
-            <a:r>
-              <a:rPr sz="1600" b="1" i="0">
-                <a:solidFill>
-                  <a:srgbClr val="19462B"/>
-                </a:solidFill>
-                <a:latin typeface="Trebuchet MS"/>
-              </a:rPr>
-              <a:t>Text messages.</a:t>
-            </a:r>
-            <a:r>
-              <a:rPr sz="1600" b="0" i="0">
+              <a:t>$16.00 / year</a:t>
+            </a:r>
+          </a:p>
+        </p:txBody>
+      </p:sp>
+      <p:sp>
+        <p:nvSpPr>
+          <p:cNvPr id="23" name="TextBox 22"/>
+          <p:cNvSpPr txBox="1"/>
+          <p:nvPr/>
+        </p:nvSpPr>
+        <p:spPr>
+          <a:xfrm>
+            <a:off x="777240" y="5065776"/>
+            <a:ext cx="7863840" cy="411480"/>
+          </a:xfrm>
+          <a:prstGeom prst="rect">
+            <a:avLst/>
+          </a:prstGeom>
+          <a:noFill/>
+        </p:spPr>
+        <p:txBody>
+          <a:bodyPr wrap="square">
+            <a:spAutoFit/>
+          </a:bodyPr>
+          <a:lstStyle/>
+          <a:p>
+            <a:pPr algn="l"/>
+            <a:r>
+              <a:rPr sz="1500" b="0" i="0">
                 <a:solidFill>
                   <a:srgbClr val="1D2A21"/>
                 </a:solidFill>
                 <a:latin typeface="Trebuchet MS"/>
               </a:rPr>
-              <a:t>  A small monthly fee for the toll-free number, plus a few cents a message, once verification completes.</a:t>
-            </a:r>
-          </a:p>
-        </p:txBody>
-      </p:sp>
-      <p:sp>
-        <p:nvSpPr>
-          <p:cNvPr id="7" name="Rounded Rectangle 6"/>
+              <a:t>Text messages</a:t>
+            </a:r>
+          </a:p>
+        </p:txBody>
+      </p:sp>
+      <p:sp>
+        <p:nvSpPr>
+          <p:cNvPr id="24" name="TextBox 23"/>
+          <p:cNvSpPr txBox="1"/>
+          <p:nvPr/>
+        </p:nvSpPr>
+        <p:spPr>
+          <a:xfrm>
+            <a:off x="777240" y="5303520"/>
+            <a:ext cx="7863840" cy="320040"/>
+          </a:xfrm>
+          <a:prstGeom prst="rect">
+            <a:avLst/>
+          </a:prstGeom>
+          <a:noFill/>
+        </p:spPr>
+        <p:txBody>
+          <a:bodyPr wrap="square">
+            <a:spAutoFit/>
+          </a:bodyPr>
+          <a:lstStyle/>
+          <a:p>
+            <a:pPr algn="l"/>
+            <a:r>
+              <a:rPr sz="1100" b="0" i="0">
+                <a:solidFill>
+                  <a:srgbClr val="556666"/>
+                </a:solidFill>
+                <a:latin typeface="Trebuchet MS"/>
+              </a:rPr>
+              <a:t>The toll-free number is still being verified. Charges start when it goes live.</a:t>
+            </a:r>
+          </a:p>
+        </p:txBody>
+      </p:sp>
+      <p:sp>
+        <p:nvSpPr>
+          <p:cNvPr id="25" name="TextBox 24"/>
+          <p:cNvSpPr txBox="1"/>
+          <p:nvPr/>
+        </p:nvSpPr>
+        <p:spPr>
+          <a:xfrm>
+            <a:off x="8778240" y="5065776"/>
+            <a:ext cx="2606040" cy="411480"/>
+          </a:xfrm>
+          <a:prstGeom prst="rect">
+            <a:avLst/>
+          </a:prstGeom>
+          <a:noFill/>
+        </p:spPr>
+        <p:txBody>
+          <a:bodyPr wrap="square">
+            <a:spAutoFit/>
+          </a:bodyPr>
+          <a:lstStyle/>
+          <a:p>
+            <a:pPr algn="r"/>
+            <a:r>
+              <a:rPr sz="1500" b="0" i="0">
+                <a:solidFill>
+                  <a:srgbClr val="1D2A21"/>
+                </a:solidFill>
+                <a:latin typeface="Trebuchet MS"/>
+              </a:rPr>
+              <a:t>not billed yet</a:t>
+            </a:r>
+          </a:p>
+        </p:txBody>
+      </p:sp>
+      <p:sp>
+        <p:nvSpPr>
+          <p:cNvPr id="26" name="Rounded Rectangle 25"/>
           <p:cNvSpPr/>
           <p:nvPr/>
         </p:nvSpPr>
         <p:spPr>
           <a:xfrm>
-            <a:off x="777240" y="5486400"/>
-            <a:ext cx="10607040" cy="777240"/>
+            <a:off x="777240" y="5760720"/>
+            <a:ext cx="10607040" cy="502920"/>
           </a:xfrm>
           <a:prstGeom prst="roundRect">
             <a:avLst/>
@@ -4138,20 +4654,20 @@
           <a:p>
             <a:pPr algn="ctr"/>
             <a:r>
-              <a:rPr sz="1400" b="0" i="0">
+              <a:rPr sz="1300" b="0" i="0">
                 <a:solidFill>
                   <a:srgbClr val="19462B"/>
                 </a:solidFill>
                 <a:latin typeface="Trebuchet MS"/>
               </a:rPr>
-              <a:t>Exact figures are always in the AWS bill inside the account. Nothing here needs a purchase order.</a:t>
-            </a:r>
-          </a:p>
-        </p:txBody>
-      </p:sp>
-      <p:sp>
-        <p:nvSpPr>
-          <p:cNvPr id="8" name="TextBox 7"/>
+              <a:t>About $22 a year at today’s traffic — $6 of hosted zone plus the $16 name. Text messages are the one line that will grow.</a:t>
+            </a:r>
+          </a:p>
+        </p:txBody>
+      </p:sp>
+      <p:sp>
+        <p:nvSpPr>
+          <p:cNvPr id="27" name="TextBox 26"/>
           <p:cNvSpPr txBox="1"/>
           <p:nvPr/>
         </p:nvSpPr>
@@ -4186,7 +4702,7 @@
       </p:sp>
       <p:sp>
         <p:nvSpPr>
-          <p:cNvPr id="9" name="TextBox 8"/>
+          <p:cNvPr id="28" name="TextBox 27"/>
           <p:cNvSpPr txBox="1"/>
           <p:nvPr/>
         </p:nvSpPr>

--- a/docs/AAFA-website-overview.pptx
+++ b/docs/AAFA-website-overview.pptx
@@ -3582,7 +3582,7 @@
                 </a:solidFill>
                 <a:latin typeface="Trebuchet MS"/>
               </a:rPr>
-              <a:t>  One board member writes a message, a different one approves it. Nobody can approve their own.</a:t>
+              <a:t>  One board member writes a message; a different one approves it. Nobody can approve their own.</a:t>
             </a:r>
           </a:p>
           <a:p>
@@ -5436,7 +5436,7 @@
                 </a:solidFill>
                 <a:latin typeface="Trebuchet MS"/>
               </a:rPr>
-              <a:t>  The AWS account and the GitHub organisation are both owned by the Alliance, not by an individual.</a:t>
+              <a:t>  The AWS account and the GitHub organization are both owned by the Alliance, not by an individual.</a:t>
             </a:r>
           </a:p>
         </p:txBody>
@@ -5810,7 +5810,7 @@
                 </a:solidFill>
                 <a:latin typeface="Trebuchet MS"/>
               </a:rPr>
-              <a:t>Behind a locked door, board members type meeting notices, news articles, and messages to the membership.</a:t>
+              <a:t>Behind a locked door — the /admin/ part of the same website — board members type meeting notices, news articles, and messages to the membership.</a:t>
             </a:r>
           </a:p>
           <a:p>
@@ -6141,7 +6141,7 @@
                 </a:solidFill>
                 <a:latin typeface="Trebuchet MS"/>
               </a:rPr>
-              <a:t>BOARD MEMBER  —  signed in</a:t>
+              <a:t>BOARD MEMBER  —  signed in at /admin/</a:t>
             </a:r>
           </a:p>
         </p:txBody>
@@ -9980,7 +9980,7 @@
                 </a:solidFill>
                 <a:latin typeface="Trebuchet MS"/>
               </a:rPr>
-              <a:t>  Sends anything scheduled, and clears out sign-ups that were never confirmed.</a:t>
+              <a:t>  Sends anything scheduled and clears out sign-ups that were never confirmed.</a:t>
             </a:r>
           </a:p>
         </p:txBody>
@@ -10363,7 +10363,7 @@
                 </a:solidFill>
                 <a:latin typeface="Trebuchet MS"/>
               </a:rPr>
-              <a:t>  Adding somebody to the Board section does not give them access to edit the site, and removing them does not take it away.</a:t>
+              <a:t>  Adding somebody to the Board section does not give them access to edit the site and removing them does not take it away.</a:t>
             </a:r>
           </a:p>
           <a:p>
@@ -10431,7 +10431,7 @@
                 </a:solidFill>
                 <a:latin typeface="Trebuchet MS"/>
               </a:rPr>
-              <a:t>  Mark them as a past board member, and ask whoever manages the account to remove their login.</a:t>
+              <a:t>  Mark them as a past board member and ask whoever manages the account to remove their login.</a:t>
             </a:r>
           </a:p>
         </p:txBody>
